--- a/e2e/fixtures/office/sample.pptx
+++ b/e2e/fixtures/office/sample.pptx
@@ -861,8 +861,8 @@
         </p:nvSpPr>
         <p:spPr>
           <a:xfrm>
-            <a:off x="0" y="0"/>
-            <a:ext cx="360" cy="360"/>
+            <a:off x="457200" y="274638"/>
+            <a:ext cx="8229600" cy="2130000"/>
           </a:xfrm>
           <a:noFill/>
           <a:ln w="0">
